--- a/test/output/sample.pptx
+++ b/test/output/sample.pptx
@@ -977,7 +977,7 @@
           </a:xfrm>
           <a:prstGeom prst="roundRect">
             <a:avLst>
-              <a:gd name="adj" fmla="val 308571"/>
+              <a:gd name="adj" fmla="val 4286"/>
             </a:avLst>
           </a:prstGeom>
           <a:solidFill>
@@ -985,7 +985,7 @@
           </a:solidFill>
           <a:ln/>
           <a:effectLst>
-            <a:outerShdw sx="100000" sy="100000" kx="0" ky="0" algn="bl" rotWithShape="0" blurRad="152400" dist="50800" dir="5400000">
+            <a:outerShdw sx="100000" sy="100000" kx="0" ky="0" algn="bl" rotWithShape="0" blurRad="152400" dist="76200" dir="5400000">
               <a:srgbClr val="000000">
                 <a:alpha val="25000"/>
               </a:srgbClr>
@@ -1114,7 +1114,7 @@
           </a:xfrm>
           <a:prstGeom prst="roundRect">
             <a:avLst>
-              <a:gd name="adj" fmla="val 3600000"/>
+              <a:gd name="adj" fmla="val 50000"/>
             </a:avLst>
           </a:prstGeom>
           <a:solidFill>
@@ -1323,7 +1323,7 @@
           </a:xfrm>
           <a:prstGeom prst="roundRect">
             <a:avLst>
-              <a:gd name="adj" fmla="val 384000"/>
+              <a:gd name="adj" fmla="val 5333"/>
             </a:avLst>
           </a:prstGeom>
           <a:solidFill>
